--- a/curso_es/pptx/S39.pptx
+++ b/curso_es/pptx/S39.pptx
@@ -7488,7 +7488,7 @@
                           </a:solidFill>
                           <a:latin typeface="Nunito Sans"/>
                         </a:rPr>
-                        <a:t>Los 3 amigos de Kevin</a:t>
+                        <a:t>Los 3 amigos de un chico</a:t>
                       </a:r>
                     </a:p>
                   </a:txBody>
